--- a/canvas_material/lectures/powerpoint/Session21-CheckInStudio.pptx
+++ b/canvas_material/lectures/powerpoint/Session21-CheckInStudio.pptx
@@ -690,7 +690,7 @@
           <a:p>
             <a:r>
               <a:rPr lang="en-US" dirty="0"/>
-              <a:t>Five minutes with the next two slides. Write the demo order and audit pairings on the board before you show this; pairings are the review partners from Session 20. Time-boxes are hard on Wednesday: a demo that runs long takes time from someone else's. Class barely touches demo craft today, so point them at the CP10 assignment and the Session 22 page tonight. CP9 goes in through Canvas before class, not during it.</a:t>
+              <a:t>Five minutes with the next two slides. Write the demo order on the board before you show this. Audit pairings wait for Wednesday's attendance (the Session 20 review partners where both are there). Time-boxes are hard on Wednesday: a demo that runs long takes time from someone else's. Class barely touches demo craft today, so point them at the CP10 assignment and the Session 22 page tonight. CP9 goes in through Canvas before class, not during it.</a:t>
             </a:r>
             <a:endParaRPr lang="en-US" dirty="0"/>
           </a:p>
@@ -3831,7 +3831,7 @@
                 <a:ea typeface="Calibri" pitchFamily="34" charset="-122"/>
                 <a:cs typeface="Calibri" pitchFamily="34" charset="-120"/>
               </a:rPr>
-              <a:t>4 min</a:t>
+              <a:t>3 min</a:t>
             </a:r>
             <a:endParaRPr lang="en-US" sz="1700" dirty="0"/>
           </a:p>
@@ -3977,7 +3977,7 @@
                 <a:ea typeface="Calibri" pitchFamily="34" charset="-122"/>
                 <a:cs typeface="Calibri" pitchFamily="34" charset="-120"/>
               </a:rPr>
-              <a:t>~34 min</a:t>
+              <a:t>36 min</a:t>
             </a:r>
             <a:endParaRPr lang="en-US" sz="1700" dirty="0"/>
           </a:p>
@@ -4055,7 +4055,7 @@
                 <a:ea typeface="Calibri" pitchFamily="34" charset="-122"/>
                 <a:cs typeface="Calibri" pitchFamily="34" charset="-120"/>
               </a:rPr>
-              <a:t>About 6 min each, then 3 min of questions. Read ahead: the CP10 assignment and the Session 22 page.</a:t>
+              <a:t>6 min each, 2 of questions, 1 to swap. Read ahead: the CP10 assignment and the Session 22 page.</a:t>
             </a:r>
             <a:endParaRPr lang="en-US" sz="1600" dirty="0"/>
           </a:p>
@@ -4269,7 +4269,7 @@
                 <a:ea typeface="Calibri" pitchFamily="34" charset="-122"/>
                 <a:cs typeface="Calibri" pitchFamily="34" charset="-120"/>
               </a:rPr>
-              <a:t>5 min</a:t>
+              <a:t>4 min</a:t>
             </a:r>
             <a:endParaRPr lang="en-US" sz="1700" dirty="0"/>
           </a:p>
@@ -4429,7 +4429,7 @@
                 <a:ea typeface="Calibri" pitchFamily="34" charset="-122"/>
                 <a:cs typeface="Calibri" pitchFamily="34" charset="-120"/>
               </a:rPr>
-              <a:t>demo order and audit pairings. Write yours down.</a:t>
+              <a:t>the demo order. Audit pairings are set Wednesday, from who's here.</a:t>
             </a:r>
             <a:endParaRPr lang="en-US" sz="1800" dirty="0"/>
           </a:p>
